--- a/docs/presentation/Iceberg Alley SAR — Project Brief.pptx
+++ b/docs/presentation/Iceberg Alley SAR — Project Brief.pptx
@@ -3951,7 +3951,7 @@
                   </a:extLst>
                 </a:hlinkClick>
               </a:rPr>
-              <a:t>github.com/natali-kovalski/Icebergs</a:t>
+              <a:t>github.com/natali-kovalski/iceberg-alley-sar</a:t>
             </a:r>
             <a:endParaRPr lang="en-US" sz="2200" dirty="0"/>
           </a:p>
